--- a/src/ppt-super/assets/tpl-15-arch-layers/template.pptx
+++ b/src/ppt-super/assets/tpl-15-arch-layers/template.pptx
@@ -3136,7 +3136,14 @@
           <a:bodyPr rtlCol="0" anchor="ctr"/>
           <a:lstStyle/>
           <a:p>
-            <a:pPr algn="ctr"/>
+            <a:pPr algn="ctr">
+              <a:spcBef>
+                <a:spcPts val="0"/>
+              </a:spcBef>
+              <a:spcAft>
+                <a:spcPts val="0"/>
+              </a:spcAft>
+            </a:pPr>
           </a:p>
         </p:txBody>
       </p:sp>
@@ -3166,14 +3173,21 @@
               <a:lnSpc>
                 <a:spcPct val="112000"/>
               </a:lnSpc>
+              <a:spcBef>
+                <a:spcPts val="0"/>
+              </a:spcBef>
+              <a:spcAft>
+                <a:spcPts val="0"/>
+              </a:spcAft>
             </a:pPr>
             <a:r>
-              <a:rPr sz="1400" b="1" i="0">
+              <a:rPr sz="1400" b="1" i="0" lang="zh-CN" altLang="zh-CN">
                 <a:solidFill>
                   <a:srgbClr val="FFFFFF"/>
                 </a:solidFill>
                 <a:latin typeface="Microsoft YaHei"/>
                 <a:ea typeface="Microsoft YaHei"/>
+                <a:cs typeface="Microsoft YaHei"/>
               </a:rPr>
               <a:t>数字底座</a:t>
             </a:r>
@@ -3206,14 +3220,21 @@
               <a:lnSpc>
                 <a:spcPct val="112000"/>
               </a:lnSpc>
+              <a:spcBef>
+                <a:spcPts val="0"/>
+              </a:spcBef>
+              <a:spcAft>
+                <a:spcPts val="0"/>
+              </a:spcAft>
             </a:pPr>
             <a:r>
-              <a:rPr sz="2200" b="1" i="0">
+              <a:rPr sz="2200" b="1" i="0" lang="zh-CN" altLang="zh-CN">
                 <a:solidFill>
                   <a:srgbClr val="B90A0A"/>
                 </a:solidFill>
                 <a:latin typeface="Microsoft YaHei"/>
                 <a:ea typeface="Microsoft YaHei"/>
+                <a:cs typeface="Microsoft YaHei"/>
               </a:rPr>
               <a:t>三层架构解耦: 应用敏捷迭代 + 平台能力复用, 新业务上线周期缩短 60%</a:t>
             </a:r>
@@ -3298,7 +3319,14 @@
           <a:bodyPr rtlCol="0" anchor="ctr"/>
           <a:lstStyle/>
           <a:p>
-            <a:pPr algn="ctr"/>
+            <a:pPr algn="ctr">
+              <a:spcBef>
+                <a:spcPts val="0"/>
+              </a:spcBef>
+              <a:spcAft>
+                <a:spcPts val="0"/>
+              </a:spcAft>
+            </a:pPr>
           </a:p>
         </p:txBody>
       </p:sp>
@@ -3342,7 +3370,14 @@
           <a:bodyPr rtlCol="0" anchor="ctr"/>
           <a:lstStyle/>
           <a:p>
-            <a:pPr algn="ctr"/>
+            <a:pPr algn="ctr">
+              <a:spcBef>
+                <a:spcPts val="0"/>
+              </a:spcBef>
+              <a:spcAft>
+                <a:spcPts val="0"/>
+              </a:spcAft>
+            </a:pPr>
           </a:p>
         </p:txBody>
       </p:sp>
@@ -3372,14 +3407,21 @@
               <a:lnSpc>
                 <a:spcPct val="112000"/>
               </a:lnSpc>
+              <a:spcBef>
+                <a:spcPts val="0"/>
+              </a:spcBef>
+              <a:spcAft>
+                <a:spcPts val="0"/>
+              </a:spcAft>
             </a:pPr>
             <a:r>
-              <a:rPr sz="1600" b="1" i="0">
+              <a:rPr sz="1600" b="1" i="0" lang="zh-CN" altLang="zh-CN">
                 <a:solidFill>
                   <a:srgbClr val="FFFFFF"/>
                 </a:solidFill>
                 <a:latin typeface="Microsoft YaHei"/>
                 <a:ea typeface="Microsoft YaHei"/>
+                <a:cs typeface="Microsoft YaHei"/>
               </a:rPr>
               <a:t>应用层</a:t>
             </a:r>
@@ -3428,7 +3470,14 @@
           <a:bodyPr rtlCol="0" anchor="ctr"/>
           <a:lstStyle/>
           <a:p>
-            <a:pPr algn="ctr"/>
+            <a:pPr algn="ctr">
+              <a:spcBef>
+                <a:spcPts val="0"/>
+              </a:spcBef>
+              <a:spcAft>
+                <a:spcPts val="0"/>
+              </a:spcAft>
+            </a:pPr>
           </a:p>
         </p:txBody>
       </p:sp>
@@ -3474,7 +3523,14 @@
           <a:bodyPr rtlCol="0" anchor="ctr"/>
           <a:lstStyle/>
           <a:p>
-            <a:pPr algn="ctr"/>
+            <a:pPr algn="ctr">
+              <a:spcBef>
+                <a:spcPts val="0"/>
+              </a:spcBef>
+              <a:spcAft>
+                <a:spcPts val="0"/>
+              </a:spcAft>
+            </a:pPr>
           </a:p>
         </p:txBody>
       </p:sp>
@@ -3523,7 +3579,14 @@
           <a:bodyPr rtlCol="0" anchor="ctr"/>
           <a:lstStyle/>
           <a:p>
-            <a:pPr algn="ctr"/>
+            <a:pPr algn="ctr">
+              <a:spcBef>
+                <a:spcPts val="0"/>
+              </a:spcBef>
+              <a:spcAft>
+                <a:spcPts val="0"/>
+              </a:spcAft>
+            </a:pPr>
           </a:p>
         </p:txBody>
       </p:sp>
@@ -3553,14 +3616,21 @@
               <a:lnSpc>
                 <a:spcPct val="112000"/>
               </a:lnSpc>
+              <a:spcBef>
+                <a:spcPts val="0"/>
+              </a:spcBef>
+              <a:spcAft>
+                <a:spcPts val="0"/>
+              </a:spcAft>
             </a:pPr>
             <a:r>
-              <a:rPr sz="1300" b="1" i="0">
+              <a:rPr sz="1300" b="1" i="0" lang="zh-CN" altLang="zh-CN">
                 <a:solidFill>
                   <a:srgbClr val="1F4E79"/>
                 </a:solidFill>
                 <a:latin typeface="Microsoft YaHei"/>
                 <a:ea typeface="Microsoft YaHei"/>
+                <a:cs typeface="Microsoft YaHei"/>
               </a:rPr>
               <a:t>智能运维助手</a:t>
             </a:r>
@@ -3593,14 +3663,21 @@
               <a:lnSpc>
                 <a:spcPct val="112000"/>
               </a:lnSpc>
+              <a:spcBef>
+                <a:spcPts val="0"/>
+              </a:spcBef>
+              <a:spcAft>
+                <a:spcPts val="0"/>
+              </a:spcAft>
             </a:pPr>
             <a:r>
-              <a:rPr sz="950" b="0" i="0">
+              <a:rPr sz="950" b="0" i="0" lang="zh-CN" altLang="zh-CN">
                 <a:solidFill>
                   <a:srgbClr val="595959"/>
                 </a:solidFill>
                 <a:latin typeface="Microsoft YaHei"/>
                 <a:ea typeface="Microsoft YaHei"/>
+                <a:cs typeface="Microsoft YaHei"/>
               </a:rPr>
               <a:t>故障自愈率 82%, 告警压缩 95%</a:t>
             </a:r>
@@ -3649,7 +3726,14 @@
           <a:bodyPr rtlCol="0" anchor="ctr"/>
           <a:lstStyle/>
           <a:p>
-            <a:pPr algn="ctr"/>
+            <a:pPr algn="ctr">
+              <a:spcBef>
+                <a:spcPts val="0"/>
+              </a:spcBef>
+              <a:spcAft>
+                <a:spcPts val="0"/>
+              </a:spcAft>
+            </a:pPr>
           </a:p>
         </p:txBody>
       </p:sp>
@@ -3693,7 +3777,14 @@
           <a:bodyPr rtlCol="0" anchor="ctr"/>
           <a:lstStyle/>
           <a:p>
-            <a:pPr algn="ctr"/>
+            <a:pPr algn="ctr">
+              <a:spcBef>
+                <a:spcPts val="0"/>
+              </a:spcBef>
+              <a:spcAft>
+                <a:spcPts val="0"/>
+              </a:spcAft>
+            </a:pPr>
           </a:p>
         </p:txBody>
       </p:sp>
@@ -3737,7 +3828,14 @@
           <a:bodyPr rtlCol="0" anchor="ctr"/>
           <a:lstStyle/>
           <a:p>
-            <a:pPr algn="ctr"/>
+            <a:pPr algn="ctr">
+              <a:spcBef>
+                <a:spcPts val="0"/>
+              </a:spcBef>
+              <a:spcAft>
+                <a:spcPts val="0"/>
+              </a:spcAft>
+            </a:pPr>
           </a:p>
         </p:txBody>
       </p:sp>
@@ -3781,7 +3879,14 @@
           <a:bodyPr rtlCol="0" anchor="ctr"/>
           <a:lstStyle/>
           <a:p>
-            <a:pPr algn="ctr"/>
+            <a:pPr algn="ctr">
+              <a:spcBef>
+                <a:spcPts val="0"/>
+              </a:spcBef>
+              <a:spcAft>
+                <a:spcPts val="0"/>
+              </a:spcAft>
+            </a:pPr>
           </a:p>
         </p:txBody>
       </p:sp>
@@ -3811,14 +3916,21 @@
               <a:lnSpc>
                 <a:spcPct val="112000"/>
               </a:lnSpc>
+              <a:spcBef>
+                <a:spcPts val="0"/>
+              </a:spcBef>
+              <a:spcAft>
+                <a:spcPts val="0"/>
+              </a:spcAft>
             </a:pPr>
             <a:r>
-              <a:rPr sz="1300" b="1" i="0">
+              <a:rPr sz="1300" b="1" i="0" lang="zh-CN" altLang="zh-CN">
                 <a:solidFill>
                   <a:srgbClr val="1F4E79"/>
                 </a:solidFill>
                 <a:latin typeface="Microsoft YaHei"/>
                 <a:ea typeface="Microsoft YaHei"/>
+                <a:cs typeface="Microsoft YaHei"/>
               </a:rPr>
               <a:t>业务编排门户</a:t>
             </a:r>
@@ -3851,14 +3963,21 @@
               <a:lnSpc>
                 <a:spcPct val="112000"/>
               </a:lnSpc>
+              <a:spcBef>
+                <a:spcPts val="0"/>
+              </a:spcBef>
+              <a:spcAft>
+                <a:spcPts val="0"/>
+              </a:spcAft>
             </a:pPr>
             <a:r>
-              <a:rPr sz="950" b="0" i="0">
+              <a:rPr sz="950" b="0" i="0" lang="zh-CN" altLang="zh-CN">
                 <a:solidFill>
                   <a:srgbClr val="595959"/>
                 </a:solidFill>
                 <a:latin typeface="Microsoft YaHei"/>
                 <a:ea typeface="Microsoft YaHei"/>
+                <a:cs typeface="Microsoft YaHei"/>
               </a:rPr>
               <a:t>拖拽式编排, 上线周期 -60%</a:t>
             </a:r>
@@ -3907,7 +4026,14 @@
           <a:bodyPr rtlCol="0" anchor="ctr"/>
           <a:lstStyle/>
           <a:p>
-            <a:pPr algn="ctr"/>
+            <a:pPr algn="ctr">
+              <a:spcBef>
+                <a:spcPts val="0"/>
+              </a:spcBef>
+              <a:spcAft>
+                <a:spcPts val="0"/>
+              </a:spcAft>
+            </a:pPr>
           </a:p>
         </p:txBody>
       </p:sp>
@@ -3951,7 +4077,14 @@
           <a:bodyPr rtlCol="0" anchor="ctr"/>
           <a:lstStyle/>
           <a:p>
-            <a:pPr algn="ctr"/>
+            <a:pPr algn="ctr">
+              <a:spcBef>
+                <a:spcPts val="0"/>
+              </a:spcBef>
+              <a:spcAft>
+                <a:spcPts val="0"/>
+              </a:spcAft>
+            </a:pPr>
           </a:p>
         </p:txBody>
       </p:sp>
@@ -3995,7 +4128,14 @@
           <a:bodyPr rtlCol="0" anchor="ctr"/>
           <a:lstStyle/>
           <a:p>
-            <a:pPr algn="ctr"/>
+            <a:pPr algn="ctr">
+              <a:spcBef>
+                <a:spcPts val="0"/>
+              </a:spcBef>
+              <a:spcAft>
+                <a:spcPts val="0"/>
+              </a:spcAft>
+            </a:pPr>
           </a:p>
         </p:txBody>
       </p:sp>
@@ -4039,7 +4179,14 @@
           <a:bodyPr rtlCol="0" anchor="ctr"/>
           <a:lstStyle/>
           <a:p>
-            <a:pPr algn="ctr"/>
+            <a:pPr algn="ctr">
+              <a:spcBef>
+                <a:spcPts val="0"/>
+              </a:spcBef>
+              <a:spcAft>
+                <a:spcPts val="0"/>
+              </a:spcAft>
+            </a:pPr>
           </a:p>
         </p:txBody>
       </p:sp>
@@ -4177,14 +4324,21 @@
               <a:lnSpc>
                 <a:spcPct val="112000"/>
               </a:lnSpc>
+              <a:spcBef>
+                <a:spcPts val="0"/>
+              </a:spcBef>
+              <a:spcAft>
+                <a:spcPts val="0"/>
+              </a:spcAft>
             </a:pPr>
             <a:r>
-              <a:rPr sz="1300" b="1" i="0">
+              <a:rPr sz="1300" b="1" i="0" lang="zh-CN" altLang="zh-CN">
                 <a:solidFill>
                   <a:srgbClr val="1F4E79"/>
                 </a:solidFill>
                 <a:latin typeface="Microsoft YaHei"/>
                 <a:ea typeface="Microsoft YaHei"/>
+                <a:cs typeface="Microsoft YaHei"/>
               </a:rPr>
               <a:t>数字孪生沙盘</a:t>
             </a:r>
@@ -4217,14 +4371,21 @@
               <a:lnSpc>
                 <a:spcPct val="112000"/>
               </a:lnSpc>
+              <a:spcBef>
+                <a:spcPts val="0"/>
+              </a:spcBef>
+              <a:spcAft>
+                <a:spcPts val="0"/>
+              </a:spcAft>
             </a:pPr>
             <a:r>
-              <a:rPr sz="950" b="0" i="0">
+              <a:rPr sz="950" b="0" i="0" lang="zh-CN" altLang="zh-CN">
                 <a:solidFill>
                   <a:srgbClr val="595959"/>
                 </a:solidFill>
                 <a:latin typeface="Microsoft YaHei"/>
                 <a:ea typeface="Microsoft YaHei"/>
+                <a:cs typeface="Microsoft YaHei"/>
               </a:rPr>
               <a:t>网络变更仿真预演, 零风险割接</a:t>
             </a:r>
@@ -4271,7 +4432,14 @@
           <a:bodyPr rtlCol="0" anchor="ctr"/>
           <a:lstStyle/>
           <a:p>
-            <a:pPr algn="ctr"/>
+            <a:pPr algn="ctr">
+              <a:spcBef>
+                <a:spcPts val="0"/>
+              </a:spcBef>
+              <a:spcAft>
+                <a:spcPts val="0"/>
+              </a:spcAft>
+            </a:pPr>
           </a:p>
         </p:txBody>
       </p:sp>
@@ -4315,7 +4483,14 @@
           <a:bodyPr rtlCol="0" anchor="ctr"/>
           <a:lstStyle/>
           <a:p>
-            <a:pPr algn="ctr"/>
+            <a:pPr algn="ctr">
+              <a:spcBef>
+                <a:spcPts val="0"/>
+              </a:spcBef>
+              <a:spcAft>
+                <a:spcPts val="0"/>
+              </a:spcAft>
+            </a:pPr>
           </a:p>
         </p:txBody>
       </p:sp>
@@ -4345,14 +4520,21 @@
               <a:lnSpc>
                 <a:spcPct val="112000"/>
               </a:lnSpc>
+              <a:spcBef>
+                <a:spcPts val="0"/>
+              </a:spcBef>
+              <a:spcAft>
+                <a:spcPts val="0"/>
+              </a:spcAft>
             </a:pPr>
             <a:r>
-              <a:rPr sz="1600" b="1" i="0">
+              <a:rPr sz="1600" b="1" i="0" lang="zh-CN" altLang="zh-CN">
                 <a:solidFill>
                   <a:srgbClr val="FFFFFF"/>
                 </a:solidFill>
                 <a:latin typeface="Microsoft YaHei"/>
                 <a:ea typeface="Microsoft YaHei"/>
+                <a:cs typeface="Microsoft YaHei"/>
               </a:rPr>
               <a:t>平台层</a:t>
             </a:r>
@@ -4401,7 +4583,14 @@
           <a:bodyPr rtlCol="0" anchor="ctr"/>
           <a:lstStyle/>
           <a:p>
-            <a:pPr algn="ctr"/>
+            <a:pPr algn="ctr">
+              <a:spcBef>
+                <a:spcPts val="0"/>
+              </a:spcBef>
+              <a:spcAft>
+                <a:spcPts val="0"/>
+              </a:spcAft>
+            </a:pPr>
           </a:p>
         </p:txBody>
       </p:sp>
@@ -4413,8 +4602,8 @@
         </p:nvSpPr>
         <p:spPr>
           <a:xfrm>
-            <a:off x="2565400" y="2865004"/>
-            <a:ext cx="254000" cy="254000"/>
+            <a:off x="2430462" y="2791344"/>
+            <a:ext cx="523875" cy="401320"/>
           </a:xfrm>
           <a:prstGeom prst="rect">
             <a:avLst/>
@@ -4431,14 +4620,21 @@
               <a:lnSpc>
                 <a:spcPct val="112000"/>
               </a:lnSpc>
+              <a:spcBef>
+                <a:spcPts val="0"/>
+              </a:spcBef>
+              <a:spcAft>
+                <a:spcPts val="0"/>
+              </a:spcAft>
             </a:pPr>
             <a:r>
-              <a:rPr sz="2400" b="1" i="0">
+              <a:rPr sz="2400" b="1" i="0" lang="zh-CN" altLang="zh-CN">
                 <a:solidFill>
                   <a:srgbClr val="1F4E79"/>
                 </a:solidFill>
                 <a:latin typeface="Microsoft YaHei"/>
                 <a:ea typeface="Microsoft YaHei"/>
+                <a:cs typeface="Microsoft YaHei"/>
               </a:rPr>
               <a:t>⚡</a:t>
             </a:r>
@@ -4471,14 +4667,21 @@
               <a:lnSpc>
                 <a:spcPct val="112000"/>
               </a:lnSpc>
+              <a:spcBef>
+                <a:spcPts val="0"/>
+              </a:spcBef>
+              <a:spcAft>
+                <a:spcPts val="0"/>
+              </a:spcAft>
             </a:pPr>
             <a:r>
-              <a:rPr sz="1300" b="1" i="0">
+              <a:rPr sz="1300" b="1" i="0" lang="zh-CN" altLang="zh-CN">
                 <a:solidFill>
                   <a:srgbClr val="1F4E79"/>
                 </a:solidFill>
                 <a:latin typeface="Microsoft YaHei"/>
                 <a:ea typeface="Microsoft YaHei"/>
+                <a:cs typeface="Microsoft YaHei"/>
               </a:rPr>
               <a:t>AI 推理服务</a:t>
             </a:r>
@@ -4511,14 +4714,21 @@
               <a:lnSpc>
                 <a:spcPct val="112000"/>
               </a:lnSpc>
+              <a:spcBef>
+                <a:spcPts val="0"/>
+              </a:spcBef>
+              <a:spcAft>
+                <a:spcPts val="0"/>
+              </a:spcAft>
             </a:pPr>
             <a:r>
-              <a:rPr sz="950" b="0" i="0">
+              <a:rPr sz="950" b="0" i="0" lang="zh-CN" altLang="zh-CN">
                 <a:solidFill>
                   <a:srgbClr val="595959"/>
                 </a:solidFill>
                 <a:latin typeface="Microsoft YaHei"/>
                 <a:ea typeface="Microsoft YaHei"/>
+                <a:cs typeface="Microsoft YaHei"/>
               </a:rPr>
               <a:t>千卡推理池化, 利用率 78%</a:t>
             </a:r>
@@ -4567,7 +4777,14 @@
           <a:bodyPr rtlCol="0" anchor="ctr"/>
           <a:lstStyle/>
           <a:p>
-            <a:pPr algn="ctr"/>
+            <a:pPr algn="ctr">
+              <a:spcBef>
+                <a:spcPts val="0"/>
+              </a:spcBef>
+              <a:spcAft>
+                <a:spcPts val="0"/>
+              </a:spcAft>
+            </a:pPr>
           </a:p>
         </p:txBody>
       </p:sp>
@@ -4613,7 +4830,14 @@
           <a:bodyPr rtlCol="0" anchor="ctr"/>
           <a:lstStyle/>
           <a:p>
-            <a:pPr algn="ctr"/>
+            <a:pPr algn="ctr">
+              <a:spcBef>
+                <a:spcPts val="0"/>
+              </a:spcBef>
+              <a:spcAft>
+                <a:spcPts val="0"/>
+              </a:spcAft>
+            </a:pPr>
           </a:p>
         </p:txBody>
       </p:sp>
@@ -4659,7 +4883,14 @@
           <a:bodyPr rtlCol="0" anchor="ctr"/>
           <a:lstStyle/>
           <a:p>
-            <a:pPr algn="ctr"/>
+            <a:pPr algn="ctr">
+              <a:spcBef>
+                <a:spcPts val="0"/>
+              </a:spcBef>
+              <a:spcAft>
+                <a:spcPts val="0"/>
+              </a:spcAft>
+            </a:pPr>
           </a:p>
         </p:txBody>
       </p:sp>
@@ -4705,7 +4936,14 @@
           <a:bodyPr rtlCol="0" anchor="ctr"/>
           <a:lstStyle/>
           <a:p>
-            <a:pPr algn="ctr"/>
+            <a:pPr algn="ctr">
+              <a:spcBef>
+                <a:spcPts val="0"/>
+              </a:spcBef>
+              <a:spcAft>
+                <a:spcPts val="0"/>
+              </a:spcAft>
+            </a:pPr>
           </a:p>
         </p:txBody>
       </p:sp>
@@ -4735,14 +4973,21 @@
               <a:lnSpc>
                 <a:spcPct val="112000"/>
               </a:lnSpc>
+              <a:spcBef>
+                <a:spcPts val="0"/>
+              </a:spcBef>
+              <a:spcAft>
+                <a:spcPts val="0"/>
+              </a:spcAft>
             </a:pPr>
             <a:r>
-              <a:rPr sz="1300" b="1" i="0">
+              <a:rPr sz="1300" b="1" i="0" lang="zh-CN" altLang="zh-CN">
                 <a:solidFill>
                   <a:srgbClr val="1F4E79"/>
                 </a:solidFill>
                 <a:latin typeface="Microsoft YaHei"/>
                 <a:ea typeface="Microsoft YaHei"/>
+                <a:cs typeface="Microsoft YaHei"/>
               </a:rPr>
               <a:t>数据治理引擎</a:t>
             </a:r>
@@ -4775,14 +5020,21 @@
               <a:lnSpc>
                 <a:spcPct val="112000"/>
               </a:lnSpc>
+              <a:spcBef>
+                <a:spcPts val="0"/>
+              </a:spcBef>
+              <a:spcAft>
+                <a:spcPts val="0"/>
+              </a:spcAft>
             </a:pPr>
             <a:r>
-              <a:rPr sz="950" b="0" i="0">
+              <a:rPr sz="950" b="0" i="0" lang="zh-CN" altLang="zh-CN">
                 <a:solidFill>
                   <a:srgbClr val="595959"/>
                 </a:solidFill>
                 <a:latin typeface="Microsoft YaHei"/>
                 <a:ea typeface="Microsoft YaHei"/>
+                <a:cs typeface="Microsoft YaHei"/>
               </a:rPr>
               <a:t>统一目录, 资产 1.2 万张表</a:t>
             </a:r>
@@ -4831,7 +5083,14 @@
           <a:bodyPr rtlCol="0" anchor="ctr"/>
           <a:lstStyle/>
           <a:p>
-            <a:pPr algn="ctr"/>
+            <a:pPr algn="ctr">
+              <a:spcBef>
+                <a:spcPts val="0"/>
+              </a:spcBef>
+              <a:spcAft>
+                <a:spcPts val="0"/>
+              </a:spcAft>
+            </a:pPr>
           </a:p>
         </p:txBody>
       </p:sp>
@@ -4877,7 +5136,14 @@
           <a:bodyPr rtlCol="0" anchor="ctr"/>
           <a:lstStyle/>
           <a:p>
-            <a:pPr algn="ctr"/>
+            <a:pPr algn="ctr">
+              <a:spcBef>
+                <a:spcPts val="0"/>
+              </a:spcBef>
+              <a:spcAft>
+                <a:spcPts val="0"/>
+              </a:spcAft>
+            </a:pPr>
           </a:p>
         </p:txBody>
       </p:sp>
@@ -5015,14 +5281,21 @@
               <a:lnSpc>
                 <a:spcPct val="112000"/>
               </a:lnSpc>
+              <a:spcBef>
+                <a:spcPts val="0"/>
+              </a:spcBef>
+              <a:spcAft>
+                <a:spcPts val="0"/>
+              </a:spcAft>
             </a:pPr>
             <a:r>
-              <a:rPr sz="1300" b="1" i="0">
+              <a:rPr sz="1300" b="1" i="0" lang="zh-CN" altLang="zh-CN">
                 <a:solidFill>
                   <a:srgbClr val="1F4E79"/>
                 </a:solidFill>
                 <a:latin typeface="Microsoft YaHei"/>
                 <a:ea typeface="Microsoft YaHei"/>
+                <a:cs typeface="Microsoft YaHei"/>
               </a:rPr>
               <a:t>低代码开发</a:t>
             </a:r>
@@ -5055,14 +5328,21 @@
               <a:lnSpc>
                 <a:spcPct val="112000"/>
               </a:lnSpc>
+              <a:spcBef>
+                <a:spcPts val="0"/>
+              </a:spcBef>
+              <a:spcAft>
+                <a:spcPts val="0"/>
+              </a:spcAft>
             </a:pPr>
             <a:r>
-              <a:rPr sz="950" b="0" i="0">
+              <a:rPr sz="950" b="0" i="0" lang="zh-CN" altLang="zh-CN">
                 <a:solidFill>
                   <a:srgbClr val="595959"/>
                 </a:solidFill>
                 <a:latin typeface="Microsoft YaHei"/>
                 <a:ea typeface="Microsoft YaHei"/>
+                <a:cs typeface="Microsoft YaHei"/>
               </a:rPr>
               <a:t>组件 600+, 能力复用率 75%</a:t>
             </a:r>
@@ -5109,7 +5389,14 @@
           <a:bodyPr rtlCol="0" anchor="ctr"/>
           <a:lstStyle/>
           <a:p>
-            <a:pPr algn="ctr"/>
+            <a:pPr algn="ctr">
+              <a:spcBef>
+                <a:spcPts val="0"/>
+              </a:spcBef>
+              <a:spcAft>
+                <a:spcPts val="0"/>
+              </a:spcAft>
+            </a:pPr>
           </a:p>
         </p:txBody>
       </p:sp>
@@ -5153,7 +5440,14 @@
           <a:bodyPr rtlCol="0" anchor="ctr"/>
           <a:lstStyle/>
           <a:p>
-            <a:pPr algn="ctr"/>
+            <a:pPr algn="ctr">
+              <a:spcBef>
+                <a:spcPts val="0"/>
+              </a:spcBef>
+              <a:spcAft>
+                <a:spcPts val="0"/>
+              </a:spcAft>
+            </a:pPr>
           </a:p>
         </p:txBody>
       </p:sp>
@@ -5183,14 +5477,21 @@
               <a:lnSpc>
                 <a:spcPct val="112000"/>
               </a:lnSpc>
+              <a:spcBef>
+                <a:spcPts val="0"/>
+              </a:spcBef>
+              <a:spcAft>
+                <a:spcPts val="0"/>
+              </a:spcAft>
             </a:pPr>
             <a:r>
-              <a:rPr sz="1600" b="1" i="0">
+              <a:rPr sz="1600" b="1" i="0" lang="zh-CN" altLang="zh-CN">
                 <a:solidFill>
                   <a:srgbClr val="FFFFFF"/>
                 </a:solidFill>
                 <a:latin typeface="Microsoft YaHei"/>
                 <a:ea typeface="Microsoft YaHei"/>
+                <a:cs typeface="Microsoft YaHei"/>
               </a:rPr>
               <a:t>底座层</a:t>
             </a:r>
@@ -5239,7 +5540,14 @@
           <a:bodyPr rtlCol="0" anchor="ctr"/>
           <a:lstStyle/>
           <a:p>
-            <a:pPr algn="ctr"/>
+            <a:pPr algn="ctr">
+              <a:spcBef>
+                <a:spcPts val="0"/>
+              </a:spcBef>
+              <a:spcAft>
+                <a:spcPts val="0"/>
+              </a:spcAft>
+            </a:pPr>
           </a:p>
         </p:txBody>
       </p:sp>
@@ -5285,7 +5593,14 @@
           <a:bodyPr rtlCol="0" anchor="ctr"/>
           <a:lstStyle/>
           <a:p>
-            <a:pPr algn="ctr"/>
+            <a:pPr algn="ctr">
+              <a:spcBef>
+                <a:spcPts val="0"/>
+              </a:spcBef>
+              <a:spcAft>
+                <a:spcPts val="0"/>
+              </a:spcAft>
+            </a:pPr>
           </a:p>
         </p:txBody>
       </p:sp>
@@ -5331,7 +5646,14 @@
           <a:bodyPr rtlCol="0" anchor="ctr"/>
           <a:lstStyle/>
           <a:p>
-            <a:pPr algn="ctr"/>
+            <a:pPr algn="ctr">
+              <a:spcBef>
+                <a:spcPts val="0"/>
+              </a:spcBef>
+              <a:spcAft>
+                <a:spcPts val="0"/>
+              </a:spcAft>
+            </a:pPr>
           </a:p>
         </p:txBody>
       </p:sp>
@@ -5793,14 +6115,21 @@
               <a:lnSpc>
                 <a:spcPct val="112000"/>
               </a:lnSpc>
+              <a:spcBef>
+                <a:spcPts val="0"/>
+              </a:spcBef>
+              <a:spcAft>
+                <a:spcPts val="0"/>
+              </a:spcAft>
             </a:pPr>
             <a:r>
-              <a:rPr sz="1300" b="1" i="0">
+              <a:rPr sz="1300" b="1" i="0" lang="zh-CN" altLang="zh-CN">
                 <a:solidFill>
                   <a:srgbClr val="1F4E79"/>
                 </a:solidFill>
                 <a:latin typeface="Microsoft YaHei"/>
                 <a:ea typeface="Microsoft YaHei"/>
+                <a:cs typeface="Microsoft YaHei"/>
               </a:rPr>
               <a:t>昇腾算力池</a:t>
             </a:r>
@@ -5833,14 +6162,21 @@
               <a:lnSpc>
                 <a:spcPct val="112000"/>
               </a:lnSpc>
+              <a:spcBef>
+                <a:spcPts val="0"/>
+              </a:spcBef>
+              <a:spcAft>
+                <a:spcPts val="0"/>
+              </a:spcAft>
             </a:pPr>
             <a:r>
-              <a:rPr sz="950" b="0" i="0">
+              <a:rPr sz="950" b="0" i="0" lang="zh-CN" altLang="zh-CN">
                 <a:solidFill>
                   <a:srgbClr val="595959"/>
                 </a:solidFill>
                 <a:latin typeface="Microsoft YaHei"/>
                 <a:ea typeface="Microsoft YaHei"/>
+                <a:cs typeface="Microsoft YaHei"/>
               </a:rPr>
               <a:t>910B 集群 2000P, 国产化 100%</a:t>
             </a:r>
@@ -5889,7 +6225,14 @@
           <a:bodyPr rtlCol="0" anchor="ctr"/>
           <a:lstStyle/>
           <a:p>
-            <a:pPr algn="ctr"/>
+            <a:pPr algn="ctr">
+              <a:spcBef>
+                <a:spcPts val="0"/>
+              </a:spcBef>
+              <a:spcAft>
+                <a:spcPts val="0"/>
+              </a:spcAft>
+            </a:pPr>
           </a:p>
         </p:txBody>
       </p:sp>
@@ -5901,8 +6244,8 @@
         </p:nvSpPr>
         <p:spPr>
           <a:xfrm>
-            <a:off x="5283200" y="4605481"/>
-            <a:ext cx="254000" cy="254000"/>
+            <a:off x="5206174" y="4516009"/>
+            <a:ext cx="408050" cy="432943"/>
           </a:xfrm>
           <a:prstGeom prst="rect">
             <a:avLst/>
@@ -5919,14 +6262,21 @@
               <a:lnSpc>
                 <a:spcPct val="112000"/>
               </a:lnSpc>
+              <a:spcBef>
+                <a:spcPts val="0"/>
+              </a:spcBef>
+              <a:spcAft>
+                <a:spcPts val="0"/>
+              </a:spcAft>
             </a:pPr>
             <a:r>
-              <a:rPr sz="2600" b="1" i="0">
+              <a:rPr sz="2600" b="1" i="0" lang="zh-CN" altLang="zh-CN">
                 <a:solidFill>
                   <a:srgbClr val="1F4E79"/>
                 </a:solidFill>
                 <a:latin typeface="Microsoft YaHei"/>
                 <a:ea typeface="Microsoft YaHei"/>
+                <a:cs typeface="Microsoft YaHei"/>
               </a:rPr>
               <a:t>☁</a:t>
             </a:r>
@@ -5959,14 +6309,21 @@
               <a:lnSpc>
                 <a:spcPct val="112000"/>
               </a:lnSpc>
+              <a:spcBef>
+                <a:spcPts val="0"/>
+              </a:spcBef>
+              <a:spcAft>
+                <a:spcPts val="0"/>
+              </a:spcAft>
             </a:pPr>
             <a:r>
-              <a:rPr sz="1300" b="1" i="0">
+              <a:rPr sz="1300" b="1" i="0" lang="zh-CN" altLang="zh-CN">
                 <a:solidFill>
                   <a:srgbClr val="1F4E79"/>
                 </a:solidFill>
                 <a:latin typeface="Microsoft YaHei"/>
                 <a:ea typeface="Microsoft YaHei"/>
+                <a:cs typeface="Microsoft YaHei"/>
               </a:rPr>
               <a:t>分布式存储</a:t>
             </a:r>
@@ -5999,14 +6356,21 @@
               <a:lnSpc>
                 <a:spcPct val="112000"/>
               </a:lnSpc>
+              <a:spcBef>
+                <a:spcPts val="0"/>
+              </a:spcBef>
+              <a:spcAft>
+                <a:spcPts val="0"/>
+              </a:spcAft>
             </a:pPr>
             <a:r>
-              <a:rPr sz="950" b="0" i="0">
+              <a:rPr sz="950" b="0" i="0" lang="zh-CN" altLang="zh-CN">
                 <a:solidFill>
                   <a:srgbClr val="595959"/>
                 </a:solidFill>
                 <a:latin typeface="Microsoft YaHei"/>
                 <a:ea typeface="Microsoft YaHei"/>
+                <a:cs typeface="Microsoft YaHei"/>
               </a:rPr>
               <a:t>EC 纠删冗余, 可用性 99.99%</a:t>
             </a:r>
@@ -6055,7 +6419,14 @@
           <a:bodyPr rtlCol="0" anchor="ctr"/>
           <a:lstStyle/>
           <a:p>
-            <a:pPr algn="ctr"/>
+            <a:pPr algn="ctr">
+              <a:spcBef>
+                <a:spcPts val="0"/>
+              </a:spcBef>
+              <a:spcAft>
+                <a:spcPts val="0"/>
+              </a:spcAft>
+            </a:pPr>
           </a:p>
         </p:txBody>
       </p:sp>
@@ -6101,7 +6472,14 @@
           <a:bodyPr rtlCol="0" anchor="ctr"/>
           <a:lstStyle/>
           <a:p>
-            <a:pPr algn="ctr"/>
+            <a:pPr algn="ctr">
+              <a:spcBef>
+                <a:spcPts val="0"/>
+              </a:spcBef>
+              <a:spcAft>
+                <a:spcPts val="0"/>
+              </a:spcAft>
+            </a:pPr>
           </a:p>
         </p:txBody>
       </p:sp>
@@ -6131,14 +6509,21 @@
               <a:lnSpc>
                 <a:spcPct val="112000"/>
               </a:lnSpc>
+              <a:spcBef>
+                <a:spcPts val="0"/>
+              </a:spcBef>
+              <a:spcAft>
+                <a:spcPts val="0"/>
+              </a:spcAft>
             </a:pPr>
             <a:r>
-              <a:rPr sz="1500" b="1" i="0">
+              <a:rPr sz="1500" b="1" i="0" lang="zh-CN" altLang="zh-CN">
                 <a:solidFill>
                   <a:srgbClr val="1F4E79"/>
                 </a:solidFill>
                 <a:latin typeface="Microsoft YaHei"/>
                 <a:ea typeface="Microsoft YaHei"/>
+                <a:cs typeface="Microsoft YaHei"/>
               </a:rPr>
               <a:t>✓</a:t>
             </a:r>
@@ -6171,14 +6556,21 @@
               <a:lnSpc>
                 <a:spcPct val="112000"/>
               </a:lnSpc>
+              <a:spcBef>
+                <a:spcPts val="0"/>
+              </a:spcBef>
+              <a:spcAft>
+                <a:spcPts val="0"/>
+              </a:spcAft>
             </a:pPr>
             <a:r>
-              <a:rPr sz="1300" b="1" i="0">
+              <a:rPr sz="1300" b="1" i="0" lang="zh-CN" altLang="zh-CN">
                 <a:solidFill>
                   <a:srgbClr val="1F4E79"/>
                 </a:solidFill>
                 <a:latin typeface="Microsoft YaHei"/>
                 <a:ea typeface="Microsoft YaHei"/>
+                <a:cs typeface="Microsoft YaHei"/>
               </a:rPr>
               <a:t>云原生调度</a:t>
             </a:r>
@@ -6211,14 +6603,21 @@
               <a:lnSpc>
                 <a:spcPct val="112000"/>
               </a:lnSpc>
+              <a:spcBef>
+                <a:spcPts val="0"/>
+              </a:spcBef>
+              <a:spcAft>
+                <a:spcPts val="0"/>
+              </a:spcAft>
             </a:pPr>
             <a:r>
-              <a:rPr sz="950" b="0" i="0">
+              <a:rPr sz="950" b="0" i="0" lang="zh-CN" altLang="zh-CN">
                 <a:solidFill>
                   <a:srgbClr val="595959"/>
                 </a:solidFill>
                 <a:latin typeface="Microsoft YaHei"/>
                 <a:ea typeface="Microsoft YaHei"/>
+                <a:cs typeface="Microsoft YaHei"/>
               </a:rPr>
               <a:t>K8s 统一调度, 扩缩容 &lt;1min</a:t>
             </a:r>
@@ -6711,7 +7110,14 @@
           <a:bodyPr rtlCol="0" anchor="ctr"/>
           <a:lstStyle/>
           <a:p>
-            <a:pPr algn="ctr"/>
+            <a:pPr algn="ctr">
+              <a:spcBef>
+                <a:spcPts val="0"/>
+              </a:spcBef>
+              <a:spcAft>
+                <a:spcPts val="0"/>
+              </a:spcAft>
+            </a:pPr>
           </a:p>
         </p:txBody>
       </p:sp>
@@ -6755,7 +7161,14 @@
           <a:bodyPr rtlCol="0" anchor="ctr"/>
           <a:lstStyle/>
           <a:p>
-            <a:pPr algn="ctr"/>
+            <a:pPr algn="ctr">
+              <a:spcBef>
+                <a:spcPts val="0"/>
+              </a:spcBef>
+              <a:spcAft>
+                <a:spcPts val="0"/>
+              </a:spcAft>
+            </a:pPr>
           </a:p>
         </p:txBody>
       </p:sp>
@@ -6799,7 +7212,14 @@
           <a:bodyPr rtlCol="0" anchor="ctr"/>
           <a:lstStyle/>
           <a:p>
-            <a:pPr algn="ctr"/>
+            <a:pPr algn="ctr">
+              <a:spcBef>
+                <a:spcPts val="0"/>
+              </a:spcBef>
+              <a:spcAft>
+                <a:spcPts val="0"/>
+              </a:spcAft>
+            </a:pPr>
           </a:p>
         </p:txBody>
       </p:sp>
@@ -6829,14 +7249,21 @@
               <a:lnSpc>
                 <a:spcPct val="112000"/>
               </a:lnSpc>
+              <a:spcBef>
+                <a:spcPts val="0"/>
+              </a:spcBef>
+              <a:spcAft>
+                <a:spcPts val="0"/>
+              </a:spcAft>
             </a:pPr>
             <a:r>
-              <a:rPr sz="1400" b="1" i="0">
+              <a:rPr sz="1400" b="1" i="0" lang="zh-CN" altLang="zh-CN">
                 <a:solidFill>
                   <a:srgbClr val="262626"/>
                 </a:solidFill>
                 <a:latin typeface="Microsoft YaHei"/>
                 <a:ea typeface="Microsoft YaHei"/>
+                <a:cs typeface="Microsoft YaHei"/>
               </a:rPr>
               <a:t>架构亮点</a:t>
             </a:r>
@@ -6869,14 +7296,21 @@
               <a:lnSpc>
                 <a:spcPct val="130000"/>
               </a:lnSpc>
+              <a:spcBef>
+                <a:spcPts val="0"/>
+              </a:spcBef>
+              <a:spcAft>
+                <a:spcPts val="0"/>
+              </a:spcAft>
             </a:pPr>
             <a:r>
-              <a:rPr sz="1100" b="0" i="0">
+              <a:rPr sz="1100" b="0" i="0" lang="zh-CN" altLang="zh-CN">
                 <a:solidFill>
                   <a:srgbClr val="262626"/>
                 </a:solidFill>
                 <a:latin typeface="Microsoft YaHei"/>
                 <a:ea typeface="Microsoft YaHei"/>
+                <a:cs typeface="Microsoft YaHei"/>
               </a:rPr>
               <a:t>通过应用与平台彻底解耦, 新业务上线周期从 3 个月压缩至 2 周; 平台能力复用率达到 75%, 系统性消除烟囱式建设。底座资源统一纳管后利用率提升 40%, 接口全面标准化使接入成本下降 50%。配合灰度发布与秒级回滚机制, 全年变更保持零事故; 安全合规能力内嵌于架构之中, 等保三级认证一次通过。</a:t>
             </a:r>
@@ -6923,7 +7357,14 @@
           <a:bodyPr rtlCol="0" anchor="ctr"/>
           <a:lstStyle/>
           <a:p>
-            <a:pPr algn="ctr"/>
+            <a:pPr algn="ctr">
+              <a:spcBef>
+                <a:spcPts val="0"/>
+              </a:spcBef>
+              <a:spcAft>
+                <a:spcPts val="0"/>
+              </a:spcAft>
+            </a:pPr>
           </a:p>
         </p:txBody>
       </p:sp>
@@ -6967,7 +7408,14 @@
           <a:bodyPr rtlCol="0" anchor="ctr"/>
           <a:lstStyle/>
           <a:p>
-            <a:pPr algn="ctr"/>
+            <a:pPr algn="ctr">
+              <a:spcBef>
+                <a:spcPts val="0"/>
+              </a:spcBef>
+              <a:spcAft>
+                <a:spcPts val="0"/>
+              </a:spcAft>
+            </a:pPr>
           </a:p>
         </p:txBody>
       </p:sp>
@@ -7011,7 +7459,14 @@
           <a:bodyPr rtlCol="0" anchor="ctr"/>
           <a:lstStyle/>
           <a:p>
-            <a:pPr algn="ctr"/>
+            <a:pPr algn="ctr">
+              <a:spcBef>
+                <a:spcPts val="0"/>
+              </a:spcBef>
+              <a:spcAft>
+                <a:spcPts val="0"/>
+              </a:spcAft>
+            </a:pPr>
           </a:p>
         </p:txBody>
       </p:sp>
@@ -7041,14 +7496,21 @@
               <a:lnSpc>
                 <a:spcPct val="112000"/>
               </a:lnSpc>
+              <a:spcBef>
+                <a:spcPts val="0"/>
+              </a:spcBef>
+              <a:spcAft>
+                <a:spcPts val="0"/>
+              </a:spcAft>
             </a:pPr>
             <a:r>
-              <a:rPr sz="1000" b="1" i="0">
+              <a:rPr sz="1000" b="1" i="0" lang="zh-CN" altLang="zh-CN">
                 <a:solidFill>
                   <a:srgbClr val="DEEAF6"/>
                 </a:solidFill>
                 <a:latin typeface="Microsoft YaHei"/>
                 <a:ea typeface="Microsoft YaHei"/>
+                <a:cs typeface="Microsoft YaHei"/>
               </a:rPr>
               <a:t>App</a:t>
             </a:r>
@@ -7081,14 +7543,21 @@
               <a:lnSpc>
                 <a:spcPct val="112000"/>
               </a:lnSpc>
+              <a:spcBef>
+                <a:spcPts val="0"/>
+              </a:spcBef>
+              <a:spcAft>
+                <a:spcPts val="0"/>
+              </a:spcAft>
             </a:pPr>
             <a:r>
-              <a:rPr sz="1000" b="1" i="0">
+              <a:rPr sz="1000" b="1" i="0" lang="zh-CN" altLang="zh-CN">
                 <a:solidFill>
                   <a:srgbClr val="FFFFFF"/>
                 </a:solidFill>
                 <a:latin typeface="Microsoft YaHei"/>
                 <a:ea typeface="Microsoft YaHei"/>
+                <a:cs typeface="Microsoft YaHei"/>
               </a:rPr>
               <a:t>Platform</a:t>
             </a:r>
@@ -7121,14 +7590,21 @@
               <a:lnSpc>
                 <a:spcPct val="112000"/>
               </a:lnSpc>
+              <a:spcBef>
+                <a:spcPts val="0"/>
+              </a:spcBef>
+              <a:spcAft>
+                <a:spcPts val="0"/>
+              </a:spcAft>
             </a:pPr>
             <a:r>
-              <a:rPr sz="1000" b="1" i="0">
+              <a:rPr sz="1000" b="1" i="0" lang="zh-CN" altLang="zh-CN">
                 <a:solidFill>
                   <a:srgbClr val="1F4E79"/>
                 </a:solidFill>
                 <a:latin typeface="Microsoft YaHei"/>
                 <a:ea typeface="Microsoft YaHei"/>
+                <a:cs typeface="Microsoft YaHei"/>
               </a:rPr>
               <a:t>Infra</a:t>
             </a:r>
@@ -7199,14 +7675,21 @@
               <a:lnSpc>
                 <a:spcPct val="112000"/>
               </a:lnSpc>
+              <a:spcBef>
+                <a:spcPts val="0"/>
+              </a:spcBef>
+              <a:spcAft>
+                <a:spcPts val="0"/>
+              </a:spcAft>
             </a:pPr>
             <a:r>
-              <a:rPr sz="1000" b="0" i="0">
+              <a:rPr sz="1000" b="0" i="0" lang="zh-CN" altLang="zh-CN">
                 <a:solidFill>
                   <a:srgbClr val="595959"/>
                 </a:solidFill>
                 <a:latin typeface="Microsoft YaHei"/>
                 <a:ea typeface="Microsoft YaHei"/>
+                <a:cs typeface="Microsoft YaHei"/>
               </a:rPr>
               <a:t>层间标准接口 · 双向赋能</a:t>
             </a:r>
@@ -7253,7 +7736,14 @@
           <a:bodyPr rtlCol="0" anchor="ctr"/>
           <a:lstStyle/>
           <a:p>
-            <a:pPr algn="ctr"/>
+            <a:pPr algn="ctr">
+              <a:spcBef>
+                <a:spcPts val="0"/>
+              </a:spcBef>
+              <a:spcAft>
+                <a:spcPts val="0"/>
+              </a:spcAft>
+            </a:pPr>
           </a:p>
         </p:txBody>
       </p:sp>
@@ -7283,14 +7773,21 @@
               <a:lnSpc>
                 <a:spcPct val="112000"/>
               </a:lnSpc>
+              <a:spcBef>
+                <a:spcPts val="0"/>
+              </a:spcBef>
+              <a:spcAft>
+                <a:spcPts val="0"/>
+              </a:spcAft>
             </a:pPr>
             <a:r>
-              <a:rPr sz="1400" b="1" i="0">
+              <a:rPr sz="1400" b="1" i="0" lang="zh-CN" altLang="zh-CN">
                 <a:solidFill>
                   <a:srgbClr val="262626"/>
                 </a:solidFill>
                 <a:latin typeface="Microsoft YaHei"/>
                 <a:ea typeface="Microsoft YaHei"/>
+                <a:cs typeface="Microsoft YaHei"/>
               </a:rPr>
               <a:t>上线周期 -60%</a:t>
             </a:r>
@@ -7337,7 +7834,14 @@
           <a:bodyPr rtlCol="0" anchor="ctr"/>
           <a:lstStyle/>
           <a:p>
-            <a:pPr algn="ctr"/>
+            <a:pPr algn="ctr">
+              <a:spcBef>
+                <a:spcPts val="0"/>
+              </a:spcBef>
+              <a:spcAft>
+                <a:spcPts val="0"/>
+              </a:spcAft>
+            </a:pPr>
           </a:p>
         </p:txBody>
       </p:sp>
@@ -7381,7 +7885,14 @@
           <a:bodyPr rtlCol="0" anchor="ctr"/>
           <a:lstStyle/>
           <a:p>
-            <a:pPr algn="ctr"/>
+            <a:pPr algn="ctr">
+              <a:spcBef>
+                <a:spcPts val="0"/>
+              </a:spcBef>
+              <a:spcAft>
+                <a:spcPts val="0"/>
+              </a:spcAft>
+            </a:pPr>
           </a:p>
         </p:txBody>
       </p:sp>
@@ -7411,14 +7922,21 @@
               <a:lnSpc>
                 <a:spcPct val="112000"/>
               </a:lnSpc>
+              <a:spcBef>
+                <a:spcPts val="0"/>
+              </a:spcBef>
+              <a:spcAft>
+                <a:spcPts val="0"/>
+              </a:spcAft>
             </a:pPr>
             <a:r>
-              <a:rPr sz="1300" b="1" i="0">
+              <a:rPr sz="1300" b="1" i="0" lang="zh-CN" altLang="zh-CN">
                 <a:solidFill>
                   <a:srgbClr val="1F4E79"/>
                 </a:solidFill>
                 <a:latin typeface="Microsoft YaHei"/>
                 <a:ea typeface="Microsoft YaHei"/>
+                <a:cs typeface="Microsoft YaHei"/>
               </a:rPr>
               <a:t>统一底座</a:t>
             </a:r>
@@ -7451,14 +7969,21 @@
               <a:lnSpc>
                 <a:spcPct val="112000"/>
               </a:lnSpc>
+              <a:spcBef>
+                <a:spcPts val="0"/>
+              </a:spcBef>
+              <a:spcAft>
+                <a:spcPts val="0"/>
+              </a:spcAft>
             </a:pPr>
             <a:r>
-              <a:rPr sz="1200" b="0" i="0">
+              <a:rPr sz="1200" b="0" i="0" lang="zh-CN" altLang="zh-CN">
                 <a:solidFill>
                   <a:srgbClr val="262626"/>
                 </a:solidFill>
                 <a:latin typeface="Microsoft YaHei"/>
                 <a:ea typeface="Microsoft YaHei"/>
+                <a:cs typeface="Microsoft YaHei"/>
               </a:rPr>
               <a:t>算力/数据/安全三位一体统一纳管, 支撑上层 30+ 应用稳定运行, 全年可用性 99.99%</a:t>
             </a:r>
